--- a/education/vibe-coding-training/03_실적용.pptx
+++ b/education/vibe-coding-training/03_실적용.pptx
@@ -7688,7 +7688,7 @@
         </p:nvSpPr>
         <p:spPr>
           <a:xfrm>
-            <a:off x="502920" y="502920"/>
+            <a:off x="502920" y="457200"/>
             <a:ext cx="8229600" cy="365760"/>
           </a:xfrm>
           <a:prstGeom prst="rect">
@@ -7727,8 +7727,8 @@
         </p:nvSpPr>
         <p:spPr>
           <a:xfrm>
-            <a:off x="502920" y="1051560"/>
-            <a:ext cx="8229600" cy="822960"/>
+            <a:off x="502920" y="960120"/>
+            <a:ext cx="8229600" cy="777240"/>
           </a:xfrm>
           <a:prstGeom prst="rect">
             <a:avLst/>
@@ -7747,105 +7747,27 @@
               </a:lnSpc>
             </a:pPr>
             <a:r>
-              <a:rPr sz="4000" b="1">
+              <a:rPr sz="3800" b="1">
                 <a:solidFill>
                   <a:srgbClr val="FFFFFF"/>
                 </a:solidFill>
                 <a:latin typeface="Calibri"/>
               </a:rPr>
-              <a:t>개인용 TODO 데스크톱 앱</a:t>
-            </a:r>
-          </a:p>
-        </p:txBody>
-      </p:sp>
-      <p:sp>
-        <p:nvSpPr>
-          <p:cNvPr id="6" name="TextBox 5"/>
-          <p:cNvSpPr txBox="1"/>
-          <p:nvPr/>
-        </p:nvSpPr>
-        <p:spPr>
-          <a:xfrm>
-            <a:off x="502920" y="1920240"/>
-            <a:ext cx="8229600" cy="822960"/>
-          </a:xfrm>
-          <a:prstGeom prst="rect">
-            <a:avLst/>
-          </a:prstGeom>
-          <a:noFill/>
-        </p:spPr>
-        <p:txBody>
-          <a:bodyPr wrap="square" lIns="45720" rIns="45720" tIns="27432" bIns="27432" anchor="t">
-            <a:spAutoFit/>
-          </a:bodyPr>
-          <a:lstStyle/>
-          <a:p>
-            <a:pPr algn="ctr">
-              <a:lnSpc>
-                <a:spcPct val="115000"/>
-              </a:lnSpc>
-            </a:pPr>
-            <a:r>
-              <a:rPr sz="4000" b="1">
-                <a:solidFill>
-                  <a:srgbClr val="F97316"/>
-                </a:solidFill>
-                <a:latin typeface="Calibri"/>
-              </a:rPr>
-              <a:t>.exe 하나가 나오는 30분</a:t>
-            </a:r>
-          </a:p>
-        </p:txBody>
-      </p:sp>
-      <p:sp>
-        <p:nvSpPr>
-          <p:cNvPr id="7" name="TextBox 6"/>
-          <p:cNvSpPr txBox="1"/>
-          <p:nvPr/>
-        </p:nvSpPr>
-        <p:spPr>
-          <a:xfrm>
-            <a:off x="502920" y="3017520"/>
-            <a:ext cx="8229600" cy="502920"/>
-          </a:xfrm>
-          <a:prstGeom prst="rect">
-            <a:avLst/>
-          </a:prstGeom>
-          <a:noFill/>
-        </p:spPr>
-        <p:txBody>
-          <a:bodyPr wrap="square" lIns="45720" rIns="45720" tIns="27432" bIns="27432" anchor="t">
-            <a:spAutoFit/>
-          </a:bodyPr>
-          <a:lstStyle/>
-          <a:p>
-            <a:pPr algn="ctr">
-              <a:lnSpc>
-                <a:spcPct val="115000"/>
-              </a:lnSpc>
-            </a:pPr>
-            <a:r>
-              <a:rPr sz="1500" b="0">
-                <a:solidFill>
-                  <a:srgbClr val="C8DCFC"/>
-                </a:solidFill>
-                <a:latin typeface="Calibri"/>
-              </a:rPr>
-              <a:t>그리고 여러분이 눈으로 보게 될 것 — 코드가 아니라 .md 하나로 앱이 재현되는 순간.</a:t>
-            </a:r>
-          </a:p>
-        </p:txBody>
-      </p:sp>
-      <p:sp>
-        <p:nvSpPr>
-          <p:cNvPr id="8" name="Rounded Rectangle 7"/>
+              <a:t>같은 하네스, 두 개의 데모</a:t>
+            </a:r>
+          </a:p>
+        </p:txBody>
+      </p:sp>
+      <p:sp>
+        <p:nvSpPr>
+          <p:cNvPr id="6" name="Rounded Rectangle 5"/>
           <p:cNvSpPr/>
           <p:nvPr/>
         </p:nvSpPr>
         <p:spPr>
           <a:xfrm>
-            <a:off x="525779" y="3749039"/>
-            <a:ext cx="2606040" cy="502920"/>
+            <a:off x="502920" y="1965960"/>
+            <a:ext cx="3977639" cy="2103120"/>
           </a:xfrm>
           <a:prstGeom prst="roundRect">
             <a:avLst>
@@ -7883,14 +7805,57 @@
       </p:sp>
       <p:sp>
         <p:nvSpPr>
-          <p:cNvPr id="9" name="TextBox 8"/>
+          <p:cNvPr id="7" name="Rectangle 6"/>
+          <p:cNvSpPr/>
+          <p:nvPr/>
+        </p:nvSpPr>
+        <p:spPr>
+          <a:xfrm>
+            <a:off x="502920" y="1965960"/>
+            <a:ext cx="3977639" cy="402336"/>
+          </a:xfrm>
+          <a:prstGeom prst="rect">
+            <a:avLst/>
+          </a:prstGeom>
+          <a:solidFill>
+            <a:srgbClr val="F97316"/>
+          </a:solidFill>
+          <a:ln>
+            <a:noFill/>
+          </a:ln>
+        </p:spPr>
+        <p:style>
+          <a:lnRef idx="1">
+            <a:schemeClr val="accent1"/>
+          </a:lnRef>
+          <a:fillRef idx="3">
+            <a:schemeClr val="accent1"/>
+          </a:fillRef>
+          <a:effectRef idx="2">
+            <a:schemeClr val="accent1"/>
+          </a:effectRef>
+          <a:fontRef idx="minor">
+            <a:schemeClr val="lt1"/>
+          </a:fontRef>
+        </p:style>
+        <p:txBody>
+          <a:bodyPr rtlCol="0" anchor="ctr"/>
+          <a:lstStyle/>
+          <a:p>
+            <a:pPr algn="ctr"/>
+          </a:p>
+        </p:txBody>
+      </p:sp>
+      <p:sp>
+        <p:nvSpPr>
+          <p:cNvPr id="8" name="TextBox 7"/>
           <p:cNvSpPr txBox="1"/>
           <p:nvPr/>
         </p:nvSpPr>
         <p:spPr>
           <a:xfrm>
-            <a:off x="525779" y="3749039"/>
-            <a:ext cx="2606040" cy="502920"/>
+            <a:off x="502920" y="1965960"/>
+            <a:ext cx="3977639" cy="402336"/>
           </a:xfrm>
           <a:prstGeom prst="rect">
             <a:avLst/>
@@ -7909,13 +7874,84 @@
               </a:lnSpc>
             </a:pPr>
             <a:r>
-              <a:rPr sz="1200" b="1">
-                <a:solidFill>
-                  <a:srgbClr val="F97316"/>
-                </a:solidFill>
-                <a:latin typeface="Calibri"/>
-              </a:rPr>
-              <a:t>Electron + React + TS</a:t>
+              <a:rPr sz="1400" b="1">
+                <a:solidFill>
+                  <a:srgbClr val="1A1F3A"/>
+                </a:solidFill>
+                <a:latin typeface="Calibri"/>
+              </a:rPr>
+              <a:t>1안 · 개인용 TODO 데스크톱 앱</a:t>
+            </a:r>
+          </a:p>
+        </p:txBody>
+      </p:sp>
+      <p:sp>
+        <p:nvSpPr>
+          <p:cNvPr id="9" name="TextBox 8"/>
+          <p:cNvSpPr txBox="1"/>
+          <p:nvPr/>
+        </p:nvSpPr>
+        <p:spPr>
+          <a:xfrm>
+            <a:off x="667512" y="2478024"/>
+            <a:ext cx="3648456" cy="1508760"/>
+          </a:xfrm>
+          <a:prstGeom prst="rect">
+            <a:avLst/>
+          </a:prstGeom>
+          <a:noFill/>
+        </p:spPr>
+        <p:txBody>
+          <a:bodyPr wrap="square" lIns="45720" rIns="45720" tIns="27432" bIns="27432" anchor="t">
+            <a:spAutoFit/>
+          </a:bodyPr>
+          <a:lstStyle/>
+          <a:p>
+            <a:pPr algn="l">
+              <a:lnSpc>
+                <a:spcPct val="120000"/>
+              </a:lnSpc>
+            </a:pPr>
+            <a:r>
+              <a:rPr sz="1300" b="1">
+                <a:solidFill>
+                  <a:srgbClr val="FFFFFF"/>
+                </a:solidFill>
+                <a:latin typeface="Calibri"/>
+              </a:rPr>
+              <a:t>Electron + React + TS  →  .exe</a:t>
+            </a:r>
+          </a:p>
+          <a:p>
+            <a:pPr algn="l">
+              <a:lnSpc>
+                <a:spcPct val="120000"/>
+              </a:lnSpc>
+            </a:pPr>
+            <a:r>
+              <a:rPr sz="1200" b="0">
+                <a:solidFill>
+                  <a:srgbClr val="C8DCFC"/>
+                </a:solidFill>
+                <a:latin typeface="Calibri"/>
+              </a:rPr>
+              <a:t>파일 저장 · 주간보고 .md 내보내기</a:t>
+            </a:r>
+          </a:p>
+          <a:p>
+            <a:pPr algn="l">
+              <a:lnSpc>
+                <a:spcPct val="120000"/>
+              </a:lnSpc>
+            </a:pPr>
+            <a:r>
+              <a:rPr sz="1200" b="0">
+                <a:solidFill>
+                  <a:srgbClr val="C8DCFC"/>
+                </a:solidFill>
+                <a:latin typeface="Calibri"/>
+              </a:rPr>
+              <a:t>풀 라이브 30분 — 설계 .md → 구현 → 재현</a:t>
             </a:r>
           </a:p>
         </p:txBody>
@@ -7928,8 +7964,8 @@
         </p:nvSpPr>
         <p:spPr>
           <a:xfrm>
-            <a:off x="3268979" y="3749039"/>
-            <a:ext cx="2606040" cy="502920"/>
+            <a:off x="4663440" y="1965960"/>
+            <a:ext cx="3977639" cy="2103120"/>
           </a:xfrm>
           <a:prstGeom prst="roundRect">
             <a:avLst>
@@ -7967,61 +8003,20 @@
       </p:sp>
       <p:sp>
         <p:nvSpPr>
-          <p:cNvPr id="11" name="TextBox 10"/>
-          <p:cNvSpPr txBox="1"/>
-          <p:nvPr/>
-        </p:nvSpPr>
-        <p:spPr>
-          <a:xfrm>
-            <a:off x="3268979" y="3749039"/>
-            <a:ext cx="2606040" cy="502920"/>
-          </a:xfrm>
-          <a:prstGeom prst="rect">
-            <a:avLst/>
-          </a:prstGeom>
-          <a:noFill/>
-        </p:spPr>
-        <p:txBody>
-          <a:bodyPr wrap="square" lIns="45720" rIns="45720" tIns="27432" bIns="27432" anchor="ctr">
-            <a:spAutoFit/>
-          </a:bodyPr>
-          <a:lstStyle/>
-          <a:p>
-            <a:pPr algn="ctr">
-              <a:lnSpc>
-                <a:spcPct val="115000"/>
-              </a:lnSpc>
-            </a:pPr>
-            <a:r>
-              <a:rPr sz="1200" b="1">
-                <a:solidFill>
-                  <a:srgbClr val="F97316"/>
-                </a:solidFill>
-                <a:latin typeface="Calibri"/>
-              </a:rPr>
-              <a:t>brainstorming으로 설계 .md</a:t>
-            </a:r>
-          </a:p>
-        </p:txBody>
-      </p:sp>
-      <p:sp>
-        <p:nvSpPr>
-          <p:cNvPr id="12" name="Rounded Rectangle 11"/>
+          <p:cNvPr id="11" name="Rectangle 10"/>
           <p:cNvSpPr/>
           <p:nvPr/>
         </p:nvSpPr>
         <p:spPr>
           <a:xfrm>
-            <a:off x="6012179" y="3749039"/>
-            <a:ext cx="2606040" cy="502920"/>
-          </a:xfrm>
-          <a:prstGeom prst="roundRect">
-            <a:avLst>
-              <a:gd name="adj" fmla="val 12000"/>
-            </a:avLst>
+            <a:off x="4663440" y="1965960"/>
+            <a:ext cx="3977639" cy="402336"/>
+          </a:xfrm>
+          <a:prstGeom prst="rect">
+            <a:avLst/>
           </a:prstGeom>
           <a:solidFill>
-            <a:srgbClr val="252D4D"/>
+            <a:srgbClr val="4FC3F7"/>
           </a:solidFill>
           <a:ln>
             <a:noFill/>
@@ -8051,14 +8046,14 @@
       </p:sp>
       <p:sp>
         <p:nvSpPr>
-          <p:cNvPr id="13" name="TextBox 12"/>
+          <p:cNvPr id="12" name="TextBox 11"/>
           <p:cNvSpPr txBox="1"/>
           <p:nvPr/>
         </p:nvSpPr>
         <p:spPr>
           <a:xfrm>
-            <a:off x="6012179" y="3749039"/>
-            <a:ext cx="2606040" cy="502920"/>
+            <a:off x="4663440" y="1965960"/>
+            <a:ext cx="3977639" cy="402336"/>
           </a:xfrm>
           <a:prstGeom prst="rect">
             <a:avLst/>
@@ -8077,27 +8072,27 @@
               </a:lnSpc>
             </a:pPr>
             <a:r>
-              <a:rPr sz="1200" b="1">
-                <a:solidFill>
-                  <a:srgbClr val="F97316"/>
-                </a:solidFill>
-                <a:latin typeface="Calibri"/>
-              </a:rPr>
-              <a:t>주간보고 .md 내보내기</a:t>
-            </a:r>
-          </a:p>
-        </p:txBody>
-      </p:sp>
-      <p:sp>
-        <p:nvSpPr>
-          <p:cNvPr id="14" name="TextBox 13"/>
+              <a:rPr sz="1400" b="1">
+                <a:solidFill>
+                  <a:srgbClr val="1A1F3A"/>
+                </a:solidFill>
+                <a:latin typeface="Calibri"/>
+              </a:rPr>
+              <a:t>2안 · 재난 주제도 지도 서비스</a:t>
+            </a:r>
+          </a:p>
+        </p:txBody>
+      </p:sp>
+      <p:sp>
+        <p:nvSpPr>
+          <p:cNvPr id="13" name="TextBox 12"/>
           <p:cNvSpPr txBox="1"/>
           <p:nvPr/>
         </p:nvSpPr>
         <p:spPr>
           <a:xfrm>
-            <a:off x="502920" y="4480560"/>
-            <a:ext cx="8229600" cy="365760"/>
+            <a:off x="4828031" y="2478024"/>
+            <a:ext cx="3648456" cy="1051560"/>
           </a:xfrm>
           <a:prstGeom prst="rect">
             <a:avLst/>
@@ -8110,19 +8105,161 @@
           </a:bodyPr>
           <a:lstStyle/>
           <a:p>
+            <a:pPr algn="l">
+              <a:lnSpc>
+                <a:spcPct val="120000"/>
+              </a:lnSpc>
+            </a:pPr>
+            <a:r>
+              <a:rPr sz="1300" b="1">
+                <a:solidFill>
+                  <a:srgbClr val="FFFFFF"/>
+                </a:solidFill>
+                <a:latin typeface="Calibri"/>
+              </a:rPr>
+              <a:t>OpenLayers + 브이월드 배경지도</a:t>
+            </a:r>
+          </a:p>
+          <a:p>
+            <a:pPr algn="l">
+              <a:lnSpc>
+                <a:spcPct val="120000"/>
+              </a:lnSpc>
+            </a:pPr>
+            <a:r>
+              <a:rPr sz="1200" b="0">
+                <a:solidFill>
+                  <a:srgbClr val="C8DCFC"/>
+                </a:solidFill>
+                <a:latin typeface="Calibri"/>
+              </a:rPr>
+              <a:t>재난 API 레이어 · shp 업로드 주제도</a:t>
+            </a:r>
+          </a:p>
+          <a:p>
+            <a:pPr algn="l">
+              <a:lnSpc>
+                <a:spcPct val="120000"/>
+              </a:lnSpc>
+            </a:pPr>
+            <a:r>
+              <a:rPr sz="1200" b="0">
+                <a:solidFill>
+                  <a:srgbClr val="C8DCFC"/>
+                </a:solidFill>
+                <a:latin typeface="Calibri"/>
+              </a:rPr>
+              <a:t>사전 세팅 위 확장 데모 — 범위 확정 중</a:t>
+            </a:r>
+          </a:p>
+        </p:txBody>
+      </p:sp>
+      <p:sp>
+        <p:nvSpPr>
+          <p:cNvPr id="14" name="TextBox 13"/>
+          <p:cNvSpPr txBox="1"/>
+          <p:nvPr/>
+        </p:nvSpPr>
+        <p:spPr>
+          <a:xfrm>
+            <a:off x="4828031" y="3264408"/>
+            <a:ext cx="3648456" cy="731520"/>
+          </a:xfrm>
+          <a:prstGeom prst="rect">
+            <a:avLst/>
+          </a:prstGeom>
+          <a:noFill/>
+        </p:spPr>
+        <p:txBody>
+          <a:bodyPr wrap="square" lIns="45720" rIns="45720" tIns="27432" bIns="27432" anchor="t">
+            <a:spAutoFit/>
+          </a:bodyPr>
+          <a:lstStyle/>
+          <a:p>
+            <a:pPr algn="l">
+              <a:lnSpc>
+                <a:spcPct val="120000"/>
+              </a:lnSpc>
+            </a:pPr>
+            <a:r>
+              <a:rPr sz="1000" b="1">
+                <a:solidFill>
+                  <a:srgbClr val="4FC3F7"/>
+                </a:solidFill>
+                <a:latin typeface="Calibri"/>
+              </a:rPr>
+              <a:t>API 발급처</a:t>
+            </a:r>
+          </a:p>
+          <a:p>
+            <a:pPr algn="l">
+              <a:lnSpc>
+                <a:spcPct val="120000"/>
+              </a:lnSpc>
+            </a:pPr>
+            <a:r>
+              <a:rPr sz="1050" b="0">
+                <a:solidFill>
+                  <a:srgbClr val="C8DCFC"/>
+                </a:solidFill>
+                <a:latin typeface="Calibri"/>
+              </a:rPr>
+              <a:t>배경지도 — 브이월드 개발자센터 (vworld.kr/dev)</a:t>
+            </a:r>
+          </a:p>
+          <a:p>
+            <a:pPr algn="l">
+              <a:lnSpc>
+                <a:spcPct val="120000"/>
+              </a:lnSpc>
+            </a:pPr>
+            <a:r>
+              <a:rPr sz="1050" b="0">
+                <a:solidFill>
+                  <a:srgbClr val="C8DCFC"/>
+                </a:solidFill>
+                <a:latin typeface="Calibri"/>
+              </a:rPr>
+              <a:t>재난 API — 확정 시 기재</a:t>
+            </a:r>
+          </a:p>
+        </p:txBody>
+      </p:sp>
+      <p:sp>
+        <p:nvSpPr>
+          <p:cNvPr id="15" name="TextBox 14"/>
+          <p:cNvSpPr txBox="1"/>
+          <p:nvPr/>
+        </p:nvSpPr>
+        <p:spPr>
+          <a:xfrm>
+            <a:off x="502920" y="4343400"/>
+            <a:ext cx="8229600" cy="502920"/>
+          </a:xfrm>
+          <a:prstGeom prst="rect">
+            <a:avLst/>
+          </a:prstGeom>
+          <a:noFill/>
+        </p:spPr>
+        <p:txBody>
+          <a:bodyPr wrap="square" lIns="45720" rIns="45720" tIns="27432" bIns="27432" anchor="t">
+            <a:spAutoFit/>
+          </a:bodyPr>
+          <a:lstStyle/>
+          <a:p>
             <a:pPr algn="ctr">
               <a:lnSpc>
                 <a:spcPct val="115000"/>
               </a:lnSpc>
             </a:pPr>
             <a:r>
-              <a:rPr sz="1300" b="1">
-                <a:solidFill>
-                  <a:srgbClr val="8899BB"/>
-                </a:solidFill>
-                <a:latin typeface="Calibri"/>
-              </a:rPr>
-              <a:t>코드는 사라져도, 문서만 있으면 돌아옵니다.</a:t>
+              <a:rPr sz="1400" b="1">
+                <a:solidFill>
+                  <a:srgbClr val="C8DCFC"/>
+                </a:solidFill>
+                <a:latin typeface="Calibri"/>
+              </a:rPr>
+              <a:t>도메인이 달라도 시작은 설계 .md — 코드는 사라져도, 문서만 있으면 돌아옵니다.</a:t>
             </a:r>
           </a:p>
         </p:txBody>
